--- a/branding/wave-3/Hong Kong/AgentCon Template.pptx
+++ b/branding/wave-3/Hong Kong/AgentCon Template.pptx
@@ -7206,7 +7206,7 @@
         </p:nvSpPr>
         <p:spPr>
           <a:xfrm>
-            <a:off x="8951272" y="3906157"/>
+            <a:off x="8951272" y="3913333"/>
             <a:ext cx="2055371" cy="769441"/>
           </a:xfrm>
           <a:prstGeom prst="rect">
